--- a/docs/_zygo/Affichage_Zygo_algo.pptx
+++ b/docs/_zygo/Affichage_Zygo_algo.pptx
@@ -244,7 +244,7 @@
           <a:p>
             <a:fld id="{DEBF15EF-4840-4A36-8AEE-0A321C0B69C4}" type="datetimeFigureOut">
               <a:rPr lang="fr-FR" smtClean="0"/>
-              <a:t>01/06/2026</a:t>
+              <a:t>03/06/2026</a:t>
             </a:fld>
             <a:endParaRPr lang="fr-FR"/>
           </a:p>
@@ -414,7 +414,7 @@
           <a:p>
             <a:fld id="{DEBF15EF-4840-4A36-8AEE-0A321C0B69C4}" type="datetimeFigureOut">
               <a:rPr lang="fr-FR" smtClean="0"/>
-              <a:t>01/06/2026</a:t>
+              <a:t>03/06/2026</a:t>
             </a:fld>
             <a:endParaRPr lang="fr-FR"/>
           </a:p>
@@ -594,7 +594,7 @@
           <a:p>
             <a:fld id="{DEBF15EF-4840-4A36-8AEE-0A321C0B69C4}" type="datetimeFigureOut">
               <a:rPr lang="fr-FR" smtClean="0"/>
-              <a:t>01/06/2026</a:t>
+              <a:t>03/06/2026</a:t>
             </a:fld>
             <a:endParaRPr lang="fr-FR"/>
           </a:p>
@@ -764,7 +764,7 @@
           <a:p>
             <a:fld id="{DEBF15EF-4840-4A36-8AEE-0A321C0B69C4}" type="datetimeFigureOut">
               <a:rPr lang="fr-FR" smtClean="0"/>
-              <a:t>01/06/2026</a:t>
+              <a:t>03/06/2026</a:t>
             </a:fld>
             <a:endParaRPr lang="fr-FR"/>
           </a:p>
@@ -1010,7 +1010,7 @@
           <a:p>
             <a:fld id="{DEBF15EF-4840-4A36-8AEE-0A321C0B69C4}" type="datetimeFigureOut">
               <a:rPr lang="fr-FR" smtClean="0"/>
-              <a:t>01/06/2026</a:t>
+              <a:t>03/06/2026</a:t>
             </a:fld>
             <a:endParaRPr lang="fr-FR"/>
           </a:p>
@@ -1242,7 +1242,7 @@
           <a:p>
             <a:fld id="{DEBF15EF-4840-4A36-8AEE-0A321C0B69C4}" type="datetimeFigureOut">
               <a:rPr lang="fr-FR" smtClean="0"/>
-              <a:t>01/06/2026</a:t>
+              <a:t>03/06/2026</a:t>
             </a:fld>
             <a:endParaRPr lang="fr-FR"/>
           </a:p>
@@ -1609,7 +1609,7 @@
           <a:p>
             <a:fld id="{DEBF15EF-4840-4A36-8AEE-0A321C0B69C4}" type="datetimeFigureOut">
               <a:rPr lang="fr-FR" smtClean="0"/>
-              <a:t>01/06/2026</a:t>
+              <a:t>03/06/2026</a:t>
             </a:fld>
             <a:endParaRPr lang="fr-FR"/>
           </a:p>
@@ -1727,7 +1727,7 @@
           <a:p>
             <a:fld id="{DEBF15EF-4840-4A36-8AEE-0A321C0B69C4}" type="datetimeFigureOut">
               <a:rPr lang="fr-FR" smtClean="0"/>
-              <a:t>01/06/2026</a:t>
+              <a:t>03/06/2026</a:t>
             </a:fld>
             <a:endParaRPr lang="fr-FR"/>
           </a:p>
@@ -1822,7 +1822,7 @@
           <a:p>
             <a:fld id="{DEBF15EF-4840-4A36-8AEE-0A321C0B69C4}" type="datetimeFigureOut">
               <a:rPr lang="fr-FR" smtClean="0"/>
-              <a:t>01/06/2026</a:t>
+              <a:t>03/06/2026</a:t>
             </a:fld>
             <a:endParaRPr lang="fr-FR"/>
           </a:p>
@@ -2099,7 +2099,7 @@
           <a:p>
             <a:fld id="{DEBF15EF-4840-4A36-8AEE-0A321C0B69C4}" type="datetimeFigureOut">
               <a:rPr lang="fr-FR" smtClean="0"/>
-              <a:t>01/06/2026</a:t>
+              <a:t>03/06/2026</a:t>
             </a:fld>
             <a:endParaRPr lang="fr-FR"/>
           </a:p>
@@ -2356,7 +2356,7 @@
           <a:p>
             <a:fld id="{DEBF15EF-4840-4A36-8AEE-0A321C0B69C4}" type="datetimeFigureOut">
               <a:rPr lang="fr-FR" smtClean="0"/>
-              <a:t>01/06/2026</a:t>
+              <a:t>03/06/2026</a:t>
             </a:fld>
             <a:endParaRPr lang="fr-FR"/>
           </a:p>
@@ -2569,7 +2569,7 @@
           <a:p>
             <a:fld id="{DEBF15EF-4840-4A36-8AEE-0A321C0B69C4}" type="datetimeFigureOut">
               <a:rPr lang="fr-FR" smtClean="0"/>
-              <a:t>01/06/2026</a:t>
+              <a:t>03/06/2026</a:t>
             </a:fld>
             <a:endParaRPr lang="fr-FR"/>
           </a:p>
@@ -6638,10 +6638,16 @@
           <a:p>
             <a:pPr algn="ctr"/>
             <a:r>
+              <a:rPr lang="fr-FR" sz="4400" b="1">
+                <a:latin typeface="Canva Sans Bold" panose="020B0604020202020204" charset="0"/>
+              </a:rPr>
+              <a:t>Ouverture </a:t>
+            </a:r>
+            <a:r>
               <a:rPr lang="fr-FR" sz="4400" b="1" dirty="0">
                 <a:latin typeface="Canva Sans Bold" panose="020B0604020202020204" charset="0"/>
               </a:rPr>
-              <a:t>Sauvegarde des images</a:t>
+              <a:t>des images</a:t>
             </a:r>
           </a:p>
         </p:txBody>
